--- a/tests/testresults/script_IQSlidedeck_IQobjects_IQ_16_9_white_QCed.pptx
+++ b/tests/testresults/script_IQSlidedeck_IQobjects_IQ_16_9_white_QCed.pptx
@@ -10179,7 +10179,7 @@
           <a:p>
             <a:r>
               <a:rPr/>
-              <a:t>2026-06-09</a:t>
+              <a:t>2026-06-25</a:t>
             </a:r>
           </a:p>
         </p:txBody>
@@ -10344,7 +10344,7 @@
           <a:p>
             <a:r>
               <a:rPr/>
-              <a:t>script_IQSlidedeck.R | Date: 2026-06-09 09:47:06.949497</a:t>
+              <a:t>script_IQSlidedeck.R | Date: 2026-06-25 13:42:34.215137</a:t>
             </a:r>
           </a:p>
         </p:txBody>
@@ -10712,7 +10712,7 @@
           <a:p>
             <a:r>
               <a:rPr/>
-              <a:t>script_IQSlidedeck.R | Date: 2026-06-09 09:47:07.894159</a:t>
+              <a:t>script_IQSlidedeck.R | Date: 2026-06-25 13:42:35.869257</a:t>
             </a:r>
           </a:p>
         </p:txBody>
@@ -11080,7 +11080,7 @@
           <a:p>
             <a:r>
               <a:rPr/>
-              <a:t>script_IQSlidedeck.R | Date: 2026-06-09 09:47:09.029357</a:t>
+              <a:t>script_IQSlidedeck.R | Date: 2026-06-25 13:42:37.091803</a:t>
             </a:r>
           </a:p>
         </p:txBody>
@@ -11270,7 +11270,7 @@
           <a:p>
             <a:r>
               <a:rPr/>
-              <a:t>script_IQSlidedeck.R | Date: 2026-06-09 09:47:17.913721</a:t>
+              <a:t>script_IQSlidedeck.R | Date: 2026-06-25 13:42:47.747289</a:t>
             </a:r>
           </a:p>
         </p:txBody>
@@ -11401,7 +11401,7 @@
           <a:p>
             <a:r>
               <a:rPr/>
-              <a:t>script_IQSlidedeck.R | Date: 2026-06-09 09:47:17.981216</a:t>
+              <a:t>script_IQSlidedeck.R | Date: 2026-06-25 13:42:47.800125</a:t>
             </a:r>
           </a:p>
         </p:txBody>
@@ -11561,7 +11561,7 @@
           <a:p>
             <a:r>
               <a:rPr/>
-              <a:t>script_IQSlidedeck.R | Date: 2026-06-09 09:47:18.055995</a:t>
+              <a:t>script_IQSlidedeck.R | Date: 2026-06-25 13:42:47.859144</a:t>
             </a:r>
           </a:p>
         </p:txBody>
@@ -11699,7 +11699,7 @@
           <a:p>
             <a:r>
               <a:rPr/>
-              <a:t>script_IQSlidedeck.R | Date: 2026-06-09 09:47:18.126241</a:t>
+              <a:t>script_IQSlidedeck.R | Date: 2026-06-25 13:42:47.917594</a:t>
             </a:r>
           </a:p>
         </p:txBody>
@@ -12138,7 +12138,7 @@
           <a:p>
             <a:r>
               <a:rPr/>
-              <a:t>IQSlidedeck_IQRobjects.R | Date: 2026-06-09 09:48:12.23004</a:t>
+              <a:t>IQSlidedeck_IQRobjects.R | Date: 2026-06-25 13:43:40.68891</a:t>
             </a:r>
           </a:p>
         </p:txBody>
@@ -12577,7 +12577,7 @@
           <a:p>
             <a:r>
               <a:rPr/>
-              <a:t>IQSlidedeck_IQRobjects.R | Date: 2026-06-09 09:48:14.337468</a:t>
+              <a:t>IQSlidedeck_IQRobjects.R | Date: 2026-06-25 13:43:42.166547</a:t>
             </a:r>
           </a:p>
         </p:txBody>
@@ -12964,7 +12964,7 @@
           <a:p>
             <a:r>
               <a:rPr/>
-              <a:t>IQSlidedeck_IQRobjects.R | Date: 2026-06-09 09:48:16.673334</a:t>
+              <a:t>IQSlidedeck_IQRobjects.R | Date: 2026-06-25 13:43:43.642429</a:t>
             </a:r>
           </a:p>
         </p:txBody>
@@ -13309,7 +13309,7 @@
           <a:p>
             <a:r>
               <a:rPr/>
-              <a:t>IQSlidedeck_IQRobjects.R | Date: 2026-06-09 09:48:20.406817</a:t>
+              <a:t>IQSlidedeck_IQRobjects.R | Date: 2026-06-25 13:43:46.645864</a:t>
             </a:r>
           </a:p>
         </p:txBody>
@@ -13442,7 +13442,7 @@
           <a:p>
             <a:r>
               <a:rPr/>
-              <a:t>IQSlidedeck_IQRobjects.R | Date: 2026-06-09 09:48:24.229172</a:t>
+              <a:t>IQSlidedeck_IQRobjects.R | Date: 2026-06-25 13:43:50.819413</a:t>
             </a:r>
           </a:p>
         </p:txBody>
@@ -13575,7 +13575,7 @@
           <a:p>
             <a:r>
               <a:rPr/>
-              <a:t>IQSlidedeck_IQRobjects.R | Date: 2026-06-09 09:48:27.041398</a:t>
+              <a:t>IQSlidedeck_IQRobjects.R | Date: 2026-06-25 13:43:53.626263</a:t>
             </a:r>
           </a:p>
         </p:txBody>
@@ -13762,7 +13762,7 @@
           <a:p>
             <a:r>
               <a:rPr/>
-              <a:t>IQSlidedeck_IQRobjects.R | Date: 2026-06-09 09:48:28.695461</a:t>
+              <a:t>IQSlidedeck_IQRobjects.R | Date: 2026-06-25 13:43:55.554646</a:t>
             </a:r>
           </a:p>
         </p:txBody>
@@ -13874,7 +13874,7 @@
           <a:p>
             <a:r>
               <a:rPr/>
-              <a:t>script_IQSlidedeck.R | Date: 2026-06-09 09:47:06.003796</a:t>
+              <a:t>script_IQSlidedeck.R | Date: 2026-06-25 13:42:33.134877</a:t>
             </a:r>
           </a:p>
         </p:txBody>
@@ -14091,7 +14091,7 @@
           <a:p>
             <a:r>
               <a:rPr/>
-              <a:t>script_IQSlidedeck.R | Date: 2026-06-09 09:47:06.191096</a:t>
+              <a:t>script_IQSlidedeck.R | Date: 2026-06-25 13:42:33.318072</a:t>
             </a:r>
           </a:p>
         </p:txBody>
@@ -14196,7 +14196,7 @@
           <a:p>
             <a:r>
               <a:rPr/>
-              <a:t>script_IQSlidedeck.R | Date: 2026-06-09 09:47:10.047847</a:t>
+              <a:t>script_IQSlidedeck.R | Date: 2026-06-25 13:42:38.134802</a:t>
             </a:r>
           </a:p>
         </p:txBody>
@@ -14301,7 +14301,7 @@
           <a:p>
             <a:r>
               <a:rPr/>
-              <a:t>script_IQSlidedeck.R | Date: 2026-06-09 09:47:11.742142</a:t>
+              <a:t>script_IQSlidedeck.R | Date: 2026-06-25 13:42:39.88711</a:t>
             </a:r>
           </a:p>
         </p:txBody>
@@ -14406,7 +14406,7 @@
           <a:p>
             <a:r>
               <a:rPr/>
-              <a:t>script_IQSlidedeck.R | Date: 2026-06-09 09:47:16.873372</a:t>
+              <a:t>script_IQSlidedeck.R | Date: 2026-06-25 13:42:46.922015</a:t>
             </a:r>
           </a:p>
         </p:txBody>
